--- a/files/Lecture_22.pptx
+++ b/files/Lecture_22.pptx
@@ -129,7 +129,7 @@
 <file path=ppt/revisionInfo.xml><?xml version="1.0" encoding="utf-8"?>
 <p1510:revInfo xmlns:a="http://schemas.openxmlformats.org/drawingml/2006/main" xmlns:r="http://schemas.openxmlformats.org/officeDocument/2006/relationships" xmlns:p1510="http://schemas.microsoft.com/office/powerpoint/2015/10/main">
   <p1510:revLst>
-    <p1510:client id="{CE6148F7-8D68-4A4E-8F96-2431CFD92223}" v="20" dt="2026-09-28T07:09:12.088"/>
+    <p1510:client id="{CE6148F7-8D68-4A4E-8F96-2431CFD92223}" v="22" dt="2026-09-28T15:57:26.701"/>
     <p1510:client id="{FFCA97DD-E542-4296-83F9-0CD00C916175}" v="33" dt="2026-09-28T05:59:46.819"/>
   </p1510:revLst>
 </p1510:revInfo>
@@ -140,12 +140,12 @@
   <pc:docChgLst>
     <pc:chgData name="Khobo, IL, Dr [ilkhobo@sun.ac.za]" userId="b519a442-dcea-4a28-9c45-7e29f1df5837" providerId="ADAL" clId="{8BC8A5CF-2DB3-45E9-BF57-F2ED810C291E}"/>
     <pc:docChg chg="undo custSel addSld delSld modSld sldOrd">
-      <pc:chgData name="Khobo, IL, Dr [ilkhobo@sun.ac.za]" userId="b519a442-dcea-4a28-9c45-7e29f1df5837" providerId="ADAL" clId="{8BC8A5CF-2DB3-45E9-BF57-F2ED810C291E}" dt="2026-09-28T07:09:12.088" v="5568" actId="207"/>
+      <pc:chgData name="Khobo, IL, Dr [ilkhobo@sun.ac.za]" userId="b519a442-dcea-4a28-9c45-7e29f1df5837" providerId="ADAL" clId="{8BC8A5CF-2DB3-45E9-BF57-F2ED810C291E}" dt="2026-09-28T15:57:26.701" v="5570" actId="20577"/>
       <pc:docMkLst>
         <pc:docMk/>
       </pc:docMkLst>
       <pc:sldChg chg="modSp add del mod">
-        <pc:chgData name="Khobo, IL, Dr [ilkhobo@sun.ac.za]" userId="b519a442-dcea-4a28-9c45-7e29f1df5837" providerId="ADAL" clId="{8BC8A5CF-2DB3-45E9-BF57-F2ED810C291E}" dt="2026-09-28T07:09:12.088" v="5568" actId="207"/>
+        <pc:chgData name="Khobo, IL, Dr [ilkhobo@sun.ac.za]" userId="b519a442-dcea-4a28-9c45-7e29f1df5837" providerId="ADAL" clId="{8BC8A5CF-2DB3-45E9-BF57-F2ED810C291E}" dt="2026-09-28T15:57:26.701" v="5570" actId="20577"/>
         <pc:sldMkLst>
           <pc:docMk/>
           <pc:sldMk cId="2601401026" sldId="597"/>
@@ -175,7 +175,7 @@
           </ac:spMkLst>
         </pc:spChg>
         <pc:spChg chg="mod">
-          <ac:chgData name="Khobo, IL, Dr [ilkhobo@sun.ac.za]" userId="b519a442-dcea-4a28-9c45-7e29f1df5837" providerId="ADAL" clId="{8BC8A5CF-2DB3-45E9-BF57-F2ED810C291E}" dt="2026-09-15T10:02:31.272" v="51" actId="20577"/>
+          <ac:chgData name="Khobo, IL, Dr [ilkhobo@sun.ac.za]" userId="b519a442-dcea-4a28-9c45-7e29f1df5837" providerId="ADAL" clId="{8BC8A5CF-2DB3-45E9-BF57-F2ED810C291E}" dt="2026-09-28T15:57:26.701" v="5570" actId="20577"/>
           <ac:spMkLst>
             <pc:docMk/>
             <pc:sldMk cId="2601401026" sldId="597"/>
@@ -8227,7 +8227,7 @@
                     <a:ea typeface="+mn-ea"/>
                     <a:cs typeface="+mn-cs"/>
                   </a:rPr>
-                  <a:t>| 23 September </a:t>
+                  <a:t>| 28 September </a:t>
                 </a:r>
                 <a:r>
                   <a:rPr kumimoji="0" lang="en-ZA" sz="2400" b="0" i="0" u="none" strike="noStrike" kern="1200" cap="none" spc="0" normalizeH="0" baseline="0" noProof="0">

--- a/files/Lecture_22.pptx
+++ b/files/Lecture_22.pptx
@@ -130,7 +130,6 @@
 <p1510:revInfo xmlns:a="http://schemas.openxmlformats.org/drawingml/2006/main" xmlns:r="http://schemas.openxmlformats.org/officeDocument/2006/relationships" xmlns:p1510="http://schemas.microsoft.com/office/powerpoint/2015/10/main">
   <p1510:revLst>
     <p1510:client id="{CE6148F7-8D68-4A4E-8F96-2431CFD92223}" v="22" dt="2026-09-28T15:57:26.701"/>
-    <p1510:client id="{FFCA97DD-E542-4296-83F9-0CD00C916175}" v="33" dt="2026-09-28T05:59:46.819"/>
   </p1510:revLst>
 </p1510:revInfo>
 </file>
@@ -197,14 +196,6 @@
           <pc:docMk/>
           <pc:sldMk cId="3208347062" sldId="598"/>
         </pc:sldMkLst>
-        <pc:spChg chg="add del mod">
-          <ac:chgData name="Khobo, IL, Dr [ilkhobo@sun.ac.za]" userId="b519a442-dcea-4a28-9c45-7e29f1df5837" providerId="ADAL" clId="{8BC8A5CF-2DB3-45E9-BF57-F2ED810C291E}" dt="2026-09-27T14:32:18.221" v="4541" actId="478"/>
-          <ac:spMkLst>
-            <pc:docMk/>
-            <pc:sldMk cId="3208347062" sldId="598"/>
-            <ac:spMk id="2" creationId="{8667FE67-9EB8-1138-9BD1-0661C8E066E5}"/>
-          </ac:spMkLst>
-        </pc:spChg>
         <pc:spChg chg="add mod">
           <ac:chgData name="Khobo, IL, Dr [ilkhobo@sun.ac.za]" userId="b519a442-dcea-4a28-9c45-7e29f1df5837" providerId="ADAL" clId="{8BC8A5CF-2DB3-45E9-BF57-F2ED810C291E}" dt="2026-09-27T14:34:42.642" v="4575" actId="207"/>
           <ac:spMkLst>
@@ -269,22 +260,6 @@
             <ac:spMk id="97" creationId="{D9D37CFD-1FF4-F0B9-4303-F75EDA2CFC0B}"/>
           </ac:spMkLst>
         </pc:spChg>
-        <pc:cxnChg chg="add del mod">
-          <ac:chgData name="Khobo, IL, Dr [ilkhobo@sun.ac.za]" userId="b519a442-dcea-4a28-9c45-7e29f1df5837" providerId="ADAL" clId="{8BC8A5CF-2DB3-45E9-BF57-F2ED810C291E}" dt="2026-09-27T14:32:18.221" v="4541" actId="478"/>
-          <ac:cxnSpMkLst>
-            <pc:docMk/>
-            <pc:sldMk cId="3208347062" sldId="598"/>
-            <ac:cxnSpMk id="4" creationId="{4B7F677C-8223-1E7A-A27F-C30594BAD476}"/>
-          </ac:cxnSpMkLst>
-        </pc:cxnChg>
-        <pc:cxnChg chg="add del mod">
-          <ac:chgData name="Khobo, IL, Dr [ilkhobo@sun.ac.za]" userId="b519a442-dcea-4a28-9c45-7e29f1df5837" providerId="ADAL" clId="{8BC8A5CF-2DB3-45E9-BF57-F2ED810C291E}" dt="2026-09-27T14:32:46.335" v="4548" actId="478"/>
-          <ac:cxnSpMkLst>
-            <pc:docMk/>
-            <pc:sldMk cId="3208347062" sldId="598"/>
-            <ac:cxnSpMk id="13" creationId="{DE80FC2E-5067-A22C-BAD0-58BFA5B13E4A}"/>
-          </ac:cxnSpMkLst>
-        </pc:cxnChg>
         <pc:cxnChg chg="add mod">
           <ac:chgData name="Khobo, IL, Dr [ilkhobo@sun.ac.za]" userId="b519a442-dcea-4a28-9c45-7e29f1df5837" providerId="ADAL" clId="{8BC8A5CF-2DB3-45E9-BF57-F2ED810C291E}" dt="2026-09-27T14:34:36.803" v="4574" actId="208"/>
           <ac:cxnSpMkLst>
@@ -324,52 +299,12 @@
             <ac:spMk id="4" creationId="{33E6D6FA-237D-82AA-AEAC-C8CD78996706}"/>
           </ac:spMkLst>
         </pc:spChg>
-        <pc:spChg chg="del">
-          <ac:chgData name="Khobo, IL, Dr [ilkhobo@sun.ac.za]" userId="b519a442-dcea-4a28-9c45-7e29f1df5837" providerId="ADAL" clId="{8BC8A5CF-2DB3-45E9-BF57-F2ED810C291E}" dt="2026-09-27T15:02:41.829" v="4728" actId="478"/>
-          <ac:spMkLst>
-            <pc:docMk/>
-            <pc:sldMk cId="4217422227" sldId="599"/>
-            <ac:spMk id="6" creationId="{BB5FB7E7-5C3B-778C-FED2-DD7A34D0E55C}"/>
-          </ac:spMkLst>
-        </pc:spChg>
         <pc:spChg chg="add mod">
           <ac:chgData name="Khobo, IL, Dr [ilkhobo@sun.ac.za]" userId="b519a442-dcea-4a28-9c45-7e29f1df5837" providerId="ADAL" clId="{8BC8A5CF-2DB3-45E9-BF57-F2ED810C291E}" dt="2026-09-27T16:32:41.004" v="4830" actId="1076"/>
           <ac:spMkLst>
             <pc:docMk/>
             <pc:sldMk cId="4217422227" sldId="599"/>
             <ac:spMk id="7" creationId="{403A1BDE-825E-0AD3-EB34-BE871AD52A29}"/>
-          </ac:spMkLst>
-        </pc:spChg>
-        <pc:spChg chg="del">
-          <ac:chgData name="Khobo, IL, Dr [ilkhobo@sun.ac.za]" userId="b519a442-dcea-4a28-9c45-7e29f1df5837" providerId="ADAL" clId="{8BC8A5CF-2DB3-45E9-BF57-F2ED810C291E}" dt="2026-09-27T15:02:41.829" v="4728" actId="478"/>
-          <ac:spMkLst>
-            <pc:docMk/>
-            <pc:sldMk cId="4217422227" sldId="599"/>
-            <ac:spMk id="8" creationId="{02ACA65A-1D05-034A-47A4-09E1A1467DD0}"/>
-          </ac:spMkLst>
-        </pc:spChg>
-        <pc:spChg chg="del">
-          <ac:chgData name="Khobo, IL, Dr [ilkhobo@sun.ac.za]" userId="b519a442-dcea-4a28-9c45-7e29f1df5837" providerId="ADAL" clId="{8BC8A5CF-2DB3-45E9-BF57-F2ED810C291E}" dt="2026-09-27T15:02:41.829" v="4728" actId="478"/>
-          <ac:spMkLst>
-            <pc:docMk/>
-            <pc:sldMk cId="4217422227" sldId="599"/>
-            <ac:spMk id="9" creationId="{F11289B5-3F4C-9A2C-6259-9D217DD1D543}"/>
-          </ac:spMkLst>
-        </pc:spChg>
-        <pc:spChg chg="del">
-          <ac:chgData name="Khobo, IL, Dr [ilkhobo@sun.ac.za]" userId="b519a442-dcea-4a28-9c45-7e29f1df5837" providerId="ADAL" clId="{8BC8A5CF-2DB3-45E9-BF57-F2ED810C291E}" dt="2026-09-27T15:02:41.829" v="4728" actId="478"/>
-          <ac:spMkLst>
-            <pc:docMk/>
-            <pc:sldMk cId="4217422227" sldId="599"/>
-            <ac:spMk id="10" creationId="{182E4B96-D0BD-3811-C655-1FB9DC1A38A4}"/>
-          </ac:spMkLst>
-        </pc:spChg>
-        <pc:spChg chg="del">
-          <ac:chgData name="Khobo, IL, Dr [ilkhobo@sun.ac.za]" userId="b519a442-dcea-4a28-9c45-7e29f1df5837" providerId="ADAL" clId="{8BC8A5CF-2DB3-45E9-BF57-F2ED810C291E}" dt="2026-09-27T15:02:41.829" v="4728" actId="478"/>
-          <ac:spMkLst>
-            <pc:docMk/>
-            <pc:sldMk cId="4217422227" sldId="599"/>
-            <ac:spMk id="12" creationId="{498CFDAC-4B4A-7B03-1DED-E876DF4E8F38}"/>
           </ac:spMkLst>
         </pc:spChg>
         <pc:spChg chg="mod">
@@ -380,22 +315,6 @@
             <ac:spMk id="36" creationId="{429E743A-632E-9EB3-5D21-ECF5187657DD}"/>
           </ac:spMkLst>
         </pc:spChg>
-        <pc:spChg chg="del topLvl">
-          <ac:chgData name="Khobo, IL, Dr [ilkhobo@sun.ac.za]" userId="b519a442-dcea-4a28-9c45-7e29f1df5837" providerId="ADAL" clId="{8BC8A5CF-2DB3-45E9-BF57-F2ED810C291E}" dt="2026-09-27T15:02:44.789" v="4729" actId="478"/>
-          <ac:spMkLst>
-            <pc:docMk/>
-            <pc:sldMk cId="4217422227" sldId="599"/>
-            <ac:spMk id="96" creationId="{88B6D518-0700-2329-B60D-914958B49F33}"/>
-          </ac:spMkLst>
-        </pc:spChg>
-        <pc:spChg chg="del topLvl">
-          <ac:chgData name="Khobo, IL, Dr [ilkhobo@sun.ac.za]" userId="b519a442-dcea-4a28-9c45-7e29f1df5837" providerId="ADAL" clId="{8BC8A5CF-2DB3-45E9-BF57-F2ED810C291E}" dt="2026-09-27T15:02:47.220" v="4730" actId="478"/>
-          <ac:spMkLst>
-            <pc:docMk/>
-            <pc:sldMk cId="4217422227" sldId="599"/>
-            <ac:spMk id="97" creationId="{BD1A077C-C26F-9DC1-BAFA-068DE80E932C}"/>
-          </ac:spMkLst>
-        </pc:spChg>
         <pc:grpChg chg="mod">
           <ac:chgData name="Khobo, IL, Dr [ilkhobo@sun.ac.za]" userId="b519a442-dcea-4a28-9c45-7e29f1df5837" providerId="ADAL" clId="{8BC8A5CF-2DB3-45E9-BF57-F2ED810C291E}" dt="2026-09-27T15:02:36.727" v="4727" actId="1076"/>
           <ac:grpSpMkLst>
@@ -404,70 +323,6 @@
             <ac:grpSpMk id="37" creationId="{1AAF1644-2C68-6654-8F0A-184FF1A11925}"/>
           </ac:grpSpMkLst>
         </pc:grpChg>
-        <pc:grpChg chg="del">
-          <ac:chgData name="Khobo, IL, Dr [ilkhobo@sun.ac.za]" userId="b519a442-dcea-4a28-9c45-7e29f1df5837" providerId="ADAL" clId="{8BC8A5CF-2DB3-45E9-BF57-F2ED810C291E}" dt="2026-09-27T15:02:41.829" v="4728" actId="478"/>
-          <ac:grpSpMkLst>
-            <pc:docMk/>
-            <pc:sldMk cId="4217422227" sldId="599"/>
-            <ac:grpSpMk id="73" creationId="{B9E284A3-A051-A11A-F604-0B5FE9FA5488}"/>
-          </ac:grpSpMkLst>
-        </pc:grpChg>
-        <pc:grpChg chg="del">
-          <ac:chgData name="Khobo, IL, Dr [ilkhobo@sun.ac.za]" userId="b519a442-dcea-4a28-9c45-7e29f1df5837" providerId="ADAL" clId="{8BC8A5CF-2DB3-45E9-BF57-F2ED810C291E}" dt="2026-09-27T15:02:41.829" v="4728" actId="478"/>
-          <ac:grpSpMkLst>
-            <pc:docMk/>
-            <pc:sldMk cId="4217422227" sldId="599"/>
-            <ac:grpSpMk id="77" creationId="{DFD4660F-94C4-655C-A66A-B4DBFB9B8983}"/>
-          </ac:grpSpMkLst>
-        </pc:grpChg>
-        <pc:grpChg chg="del">
-          <ac:chgData name="Khobo, IL, Dr [ilkhobo@sun.ac.za]" userId="b519a442-dcea-4a28-9c45-7e29f1df5837" providerId="ADAL" clId="{8BC8A5CF-2DB3-45E9-BF57-F2ED810C291E}" dt="2026-09-27T15:02:41.829" v="4728" actId="478"/>
-          <ac:grpSpMkLst>
-            <pc:docMk/>
-            <pc:sldMk cId="4217422227" sldId="599"/>
-            <ac:grpSpMk id="78" creationId="{47B0429D-E682-7109-658B-59EC853FBD2E}"/>
-          </ac:grpSpMkLst>
-        </pc:grpChg>
-        <pc:grpChg chg="del">
-          <ac:chgData name="Khobo, IL, Dr [ilkhobo@sun.ac.za]" userId="b519a442-dcea-4a28-9c45-7e29f1df5837" providerId="ADAL" clId="{8BC8A5CF-2DB3-45E9-BF57-F2ED810C291E}" dt="2026-09-27T15:02:41.829" v="4728" actId="478"/>
-          <ac:grpSpMkLst>
-            <pc:docMk/>
-            <pc:sldMk cId="4217422227" sldId="599"/>
-            <ac:grpSpMk id="79" creationId="{88DA949D-1614-E50A-F92F-552E292DD2B7}"/>
-          </ac:grpSpMkLst>
-        </pc:grpChg>
-        <pc:grpChg chg="del">
-          <ac:chgData name="Khobo, IL, Dr [ilkhobo@sun.ac.za]" userId="b519a442-dcea-4a28-9c45-7e29f1df5837" providerId="ADAL" clId="{8BC8A5CF-2DB3-45E9-BF57-F2ED810C291E}" dt="2026-09-27T15:02:41.829" v="4728" actId="478"/>
-          <ac:grpSpMkLst>
-            <pc:docMk/>
-            <pc:sldMk cId="4217422227" sldId="599"/>
-            <ac:grpSpMk id="80" creationId="{E8487324-81A5-84B8-807A-475B233085C9}"/>
-          </ac:grpSpMkLst>
-        </pc:grpChg>
-        <pc:grpChg chg="del">
-          <ac:chgData name="Khobo, IL, Dr [ilkhobo@sun.ac.za]" userId="b519a442-dcea-4a28-9c45-7e29f1df5837" providerId="ADAL" clId="{8BC8A5CF-2DB3-45E9-BF57-F2ED810C291E}" dt="2026-09-27T15:02:57.209" v="4731" actId="478"/>
-          <ac:grpSpMkLst>
-            <pc:docMk/>
-            <pc:sldMk cId="4217422227" sldId="599"/>
-            <ac:grpSpMk id="81" creationId="{D8152BE9-3A8A-887D-4F98-4C15141950BC}"/>
-          </ac:grpSpMkLst>
-        </pc:grpChg>
-        <pc:grpChg chg="del">
-          <ac:chgData name="Khobo, IL, Dr [ilkhobo@sun.ac.za]" userId="b519a442-dcea-4a28-9c45-7e29f1df5837" providerId="ADAL" clId="{8BC8A5CF-2DB3-45E9-BF57-F2ED810C291E}" dt="2026-09-27T15:02:44.789" v="4729" actId="478"/>
-          <ac:grpSpMkLst>
-            <pc:docMk/>
-            <pc:sldMk cId="4217422227" sldId="599"/>
-            <ac:grpSpMk id="95" creationId="{AB1430E1-EA30-60B8-E1F9-E0914A3CFEAE}"/>
-          </ac:grpSpMkLst>
-        </pc:grpChg>
-        <pc:cxnChg chg="mod">
-          <ac:chgData name="Khobo, IL, Dr [ilkhobo@sun.ac.za]" userId="b519a442-dcea-4a28-9c45-7e29f1df5837" providerId="ADAL" clId="{8BC8A5CF-2DB3-45E9-BF57-F2ED810C291E}" dt="2026-09-27T15:02:57.209" v="4731" actId="478"/>
-          <ac:cxnSpMkLst>
-            <pc:docMk/>
-            <pc:sldMk cId="4217422227" sldId="599"/>
-            <ac:cxnSpMk id="15" creationId="{79BC77E3-7B29-F283-BF96-7F621CB286AD}"/>
-          </ac:cxnSpMkLst>
-        </pc:cxnChg>
       </pc:sldChg>
       <pc:sldChg chg="addSp delSp modSp add mod">
         <pc:chgData name="Khobo, IL, Dr [ilkhobo@sun.ac.za]" userId="b519a442-dcea-4a28-9c45-7e29f1df5837" providerId="ADAL" clId="{8BC8A5CF-2DB3-45E9-BF57-F2ED810C291E}" dt="2026-09-27T16:50:16.508" v="4853" actId="207"/>
@@ -475,22 +330,6 @@
           <pc:docMk/>
           <pc:sldMk cId="2457691704" sldId="600"/>
         </pc:sldMkLst>
-        <pc:spChg chg="del">
-          <ac:chgData name="Khobo, IL, Dr [ilkhobo@sun.ac.za]" userId="b519a442-dcea-4a28-9c45-7e29f1df5837" providerId="ADAL" clId="{8BC8A5CF-2DB3-45E9-BF57-F2ED810C291E}" dt="2026-09-27T15:14:28.411" v="4787" actId="478"/>
-          <ac:spMkLst>
-            <pc:docMk/>
-            <pc:sldMk cId="2457691704" sldId="600"/>
-            <ac:spMk id="4" creationId="{248C0B05-2ABB-EA7C-4659-04AAF90AE747}"/>
-          </ac:spMkLst>
-        </pc:spChg>
-        <pc:spChg chg="del">
-          <ac:chgData name="Khobo, IL, Dr [ilkhobo@sun.ac.za]" userId="b519a442-dcea-4a28-9c45-7e29f1df5837" providerId="ADAL" clId="{8BC8A5CF-2DB3-45E9-BF57-F2ED810C291E}" dt="2026-09-27T15:14:28.411" v="4787" actId="478"/>
-          <ac:spMkLst>
-            <pc:docMk/>
-            <pc:sldMk cId="2457691704" sldId="600"/>
-            <ac:spMk id="7" creationId="{A263466F-1495-F462-9B8C-F2B0F87EE4C0}"/>
-          </ac:spMkLst>
-        </pc:spChg>
         <pc:spChg chg="mod">
           <ac:chgData name="Khobo, IL, Dr [ilkhobo@sun.ac.za]" userId="b519a442-dcea-4a28-9c45-7e29f1df5837" providerId="ADAL" clId="{8BC8A5CF-2DB3-45E9-BF57-F2ED810C291E}" dt="2026-09-27T16:50:16.508" v="4853" actId="207"/>
           <ac:spMkLst>
@@ -514,14 +353,6 @@
           <pc:docMk/>
           <pc:sldMk cId="461514154" sldId="601"/>
         </pc:sldMkLst>
-        <pc:spChg chg="add del">
-          <ac:chgData name="Khobo, IL, Dr [ilkhobo@sun.ac.za]" userId="b519a442-dcea-4a28-9c45-7e29f1df5837" providerId="ADAL" clId="{8BC8A5CF-2DB3-45E9-BF57-F2ED810C291E}" dt="2026-09-27T16:50:33.853" v="4857" actId="478"/>
-          <ac:spMkLst>
-            <pc:docMk/>
-            <pc:sldMk cId="461514154" sldId="601"/>
-            <ac:spMk id="4" creationId="{114CE733-288D-C8D2-A6CA-6DD43A5732D5}"/>
-          </ac:spMkLst>
-        </pc:spChg>
         <pc:spChg chg="mod">
           <ac:chgData name="Khobo, IL, Dr [ilkhobo@sun.ac.za]" userId="b519a442-dcea-4a28-9c45-7e29f1df5837" providerId="ADAL" clId="{8BC8A5CF-2DB3-45E9-BF57-F2ED810C291E}" dt="2026-09-27T16:50:29.173" v="4855" actId="20577"/>
           <ac:spMkLst>
@@ -530,14 +361,6 @@
             <ac:spMk id="36" creationId="{E020663E-4294-CA1D-A1F9-B4C61EA3F125}"/>
           </ac:spMkLst>
         </pc:spChg>
-        <pc:picChg chg="del">
-          <ac:chgData name="Khobo, IL, Dr [ilkhobo@sun.ac.za]" userId="b519a442-dcea-4a28-9c45-7e29f1df5837" providerId="ADAL" clId="{8BC8A5CF-2DB3-45E9-BF57-F2ED810C291E}" dt="2026-09-27T16:34:20.381" v="4832" actId="478"/>
-          <ac:picMkLst>
-            <pc:docMk/>
-            <pc:sldMk cId="461514154" sldId="601"/>
-            <ac:picMk id="3" creationId="{2481A3F0-DEB9-17DC-5A6F-D1888DA11D77}"/>
-          </ac:picMkLst>
-        </pc:picChg>
         <pc:picChg chg="add mod">
           <ac:chgData name="Khobo, IL, Dr [ilkhobo@sun.ac.za]" userId="b519a442-dcea-4a28-9c45-7e29f1df5837" providerId="ADAL" clId="{8BC8A5CF-2DB3-45E9-BF57-F2ED810C291E}" dt="2026-09-27T16:55:59.485" v="4899" actId="1076"/>
           <ac:picMkLst>
@@ -552,22 +375,6 @@
             <pc:docMk/>
             <pc:sldMk cId="461514154" sldId="601"/>
             <ac:picMk id="8" creationId="{8F2F1FCF-87AA-8562-A288-990D1979A080}"/>
-          </ac:picMkLst>
-        </pc:picChg>
-        <pc:picChg chg="add del mod">
-          <ac:chgData name="Khobo, IL, Dr [ilkhobo@sun.ac.za]" userId="b519a442-dcea-4a28-9c45-7e29f1df5837" providerId="ADAL" clId="{8BC8A5CF-2DB3-45E9-BF57-F2ED810C291E}" dt="2026-09-27T16:54:08.610" v="4872" actId="478"/>
-          <ac:picMkLst>
-            <pc:docMk/>
-            <pc:sldMk cId="461514154" sldId="601"/>
-            <ac:picMk id="10" creationId="{3691F433-4AF1-AE70-6B21-14564013D823}"/>
-          </ac:picMkLst>
-        </pc:picChg>
-        <pc:picChg chg="add del mod modCrop">
-          <ac:chgData name="Khobo, IL, Dr [ilkhobo@sun.ac.za]" userId="b519a442-dcea-4a28-9c45-7e29f1df5837" providerId="ADAL" clId="{8BC8A5CF-2DB3-45E9-BF57-F2ED810C291E}" dt="2026-09-27T16:55:44.116" v="4890" actId="478"/>
-          <ac:picMkLst>
-            <pc:docMk/>
-            <pc:sldMk cId="461514154" sldId="601"/>
-            <ac:picMk id="12" creationId="{462D6C3C-1DCB-D7A9-6D59-DAC284043A14}"/>
           </ac:picMkLst>
         </pc:picChg>
         <pc:picChg chg="add mod">
@@ -617,44 +424,12 @@
             <ac:spMk id="36" creationId="{1D568253-6BB8-0590-F13A-C1B90078AA26}"/>
           </ac:spMkLst>
         </pc:spChg>
-        <pc:picChg chg="add del mod">
-          <ac:chgData name="Khobo, IL, Dr [ilkhobo@sun.ac.za]" userId="b519a442-dcea-4a28-9c45-7e29f1df5837" providerId="ADAL" clId="{8BC8A5CF-2DB3-45E9-BF57-F2ED810C291E}" dt="2026-09-27T17:28:29.543" v="4939" actId="478"/>
-          <ac:picMkLst>
-            <pc:docMk/>
-            <pc:sldMk cId="1862102172" sldId="602"/>
-            <ac:picMk id="3" creationId="{9C5884B7-9ECD-882B-B644-2446C9AFC013}"/>
-          </ac:picMkLst>
-        </pc:picChg>
         <pc:picChg chg="add mod">
           <ac:chgData name="Khobo, IL, Dr [ilkhobo@sun.ac.za]" userId="b519a442-dcea-4a28-9c45-7e29f1df5837" providerId="ADAL" clId="{8BC8A5CF-2DB3-45E9-BF57-F2ED810C291E}" dt="2026-09-27T17:30:39.375" v="4945" actId="1076"/>
           <ac:picMkLst>
             <pc:docMk/>
             <pc:sldMk cId="1862102172" sldId="602"/>
             <ac:picMk id="5" creationId="{006DE3FB-D295-DC5F-A183-59CA54F52B5D}"/>
-          </ac:picMkLst>
-        </pc:picChg>
-        <pc:picChg chg="del">
-          <ac:chgData name="Khobo, IL, Dr [ilkhobo@sun.ac.za]" userId="b519a442-dcea-4a28-9c45-7e29f1df5837" providerId="ADAL" clId="{8BC8A5CF-2DB3-45E9-BF57-F2ED810C291E}" dt="2026-09-27T17:11:14.517" v="4901" actId="478"/>
-          <ac:picMkLst>
-            <pc:docMk/>
-            <pc:sldMk cId="1862102172" sldId="602"/>
-            <ac:picMk id="6" creationId="{D2D1F43A-B2C7-EEF7-5931-61C695F162B5}"/>
-          </ac:picMkLst>
-        </pc:picChg>
-        <pc:picChg chg="del">
-          <ac:chgData name="Khobo, IL, Dr [ilkhobo@sun.ac.za]" userId="b519a442-dcea-4a28-9c45-7e29f1df5837" providerId="ADAL" clId="{8BC8A5CF-2DB3-45E9-BF57-F2ED810C291E}" dt="2026-09-27T17:11:14.517" v="4901" actId="478"/>
-          <ac:picMkLst>
-            <pc:docMk/>
-            <pc:sldMk cId="1862102172" sldId="602"/>
-            <ac:picMk id="8" creationId="{88D4B77F-E602-4BDA-214A-C3C71759D83A}"/>
-          </ac:picMkLst>
-        </pc:picChg>
-        <pc:picChg chg="del">
-          <ac:chgData name="Khobo, IL, Dr [ilkhobo@sun.ac.za]" userId="b519a442-dcea-4a28-9c45-7e29f1df5837" providerId="ADAL" clId="{8BC8A5CF-2DB3-45E9-BF57-F2ED810C291E}" dt="2026-09-27T17:11:14.517" v="4901" actId="478"/>
-          <ac:picMkLst>
-            <pc:docMk/>
-            <pc:sldMk cId="1862102172" sldId="602"/>
-            <ac:picMk id="14" creationId="{32C7B710-2053-48E6-F262-295E20764B6C}"/>
           </ac:picMkLst>
         </pc:picChg>
       </pc:sldChg>
@@ -712,13 +487,6 @@
           </ac:spMkLst>
         </pc:spChg>
       </pc:sldChg>
-      <pc:sldChg chg="modSp del mod">
-        <pc:chgData name="Khobo, IL, Dr [ilkhobo@sun.ac.za]" userId="b519a442-dcea-4a28-9c45-7e29f1df5837" providerId="ADAL" clId="{8BC8A5CF-2DB3-45E9-BF57-F2ED810C291E}" dt="2026-09-27T14:12:51.665" v="4304" actId="47"/>
-        <pc:sldMkLst>
-          <pc:docMk/>
-          <pc:sldMk cId="266187088" sldId="605"/>
-        </pc:sldMkLst>
-      </pc:sldChg>
       <pc:sldChg chg="modSp add mod">
         <pc:chgData name="Khobo, IL, Dr [ilkhobo@sun.ac.za]" userId="b519a442-dcea-4a28-9c45-7e29f1df5837" providerId="ADAL" clId="{8BC8A5CF-2DB3-45E9-BF57-F2ED810C291E}" dt="2026-09-27T17:45:56.664" v="5355" actId="20577"/>
         <pc:sldMkLst>
@@ -772,36 +540,12 @@
             <ac:spMk id="8" creationId="{8B7EE7EE-0B9A-DD15-173B-4BF776D23984}"/>
           </ac:spMkLst>
         </pc:spChg>
-        <pc:spChg chg="del">
-          <ac:chgData name="Khobo, IL, Dr [ilkhobo@sun.ac.za]" userId="b519a442-dcea-4a28-9c45-7e29f1df5837" providerId="ADAL" clId="{8BC8A5CF-2DB3-45E9-BF57-F2ED810C291E}" dt="2026-09-27T17:47:04.369" v="5357" actId="478"/>
-          <ac:spMkLst>
-            <pc:docMk/>
-            <pc:sldMk cId="1492292624" sldId="606"/>
-            <ac:spMk id="9" creationId="{B23B7BD7-67BB-7920-C7B3-3B0CFB0129DB}"/>
-          </ac:spMkLst>
-        </pc:spChg>
-        <pc:spChg chg="del">
-          <ac:chgData name="Khobo, IL, Dr [ilkhobo@sun.ac.za]" userId="b519a442-dcea-4a28-9c45-7e29f1df5837" providerId="ADAL" clId="{8BC8A5CF-2DB3-45E9-BF57-F2ED810C291E}" dt="2026-09-27T17:47:04.369" v="5357" actId="478"/>
-          <ac:spMkLst>
-            <pc:docMk/>
-            <pc:sldMk cId="1492292624" sldId="606"/>
-            <ac:spMk id="11" creationId="{0557CBF3-6573-ED75-168D-AC4280C1A108}"/>
-          </ac:spMkLst>
-        </pc:spChg>
         <pc:spChg chg="add mod">
           <ac:chgData name="Khobo, IL, Dr [ilkhobo@sun.ac.za]" userId="b519a442-dcea-4a28-9c45-7e29f1df5837" providerId="ADAL" clId="{8BC8A5CF-2DB3-45E9-BF57-F2ED810C291E}" dt="2026-09-27T18:56:41.161" v="5438" actId="14100"/>
           <ac:spMkLst>
             <pc:docMk/>
             <pc:sldMk cId="1492292624" sldId="606"/>
             <ac:spMk id="12" creationId="{00AB1B84-22BC-8B88-726E-E2D26D58FAB4}"/>
-          </ac:spMkLst>
-        </pc:spChg>
-        <pc:spChg chg="del">
-          <ac:chgData name="Khobo, IL, Dr [ilkhobo@sun.ac.za]" userId="b519a442-dcea-4a28-9c45-7e29f1df5837" providerId="ADAL" clId="{8BC8A5CF-2DB3-45E9-BF57-F2ED810C291E}" dt="2026-09-27T17:47:06.456" v="5358" actId="478"/>
-          <ac:spMkLst>
-            <pc:docMk/>
-            <pc:sldMk cId="1492292624" sldId="606"/>
-            <ac:spMk id="13" creationId="{6C1B1CAF-434F-748D-4315-BBEE7F7DB495}"/>
           </ac:spMkLst>
         </pc:spChg>
         <pc:spChg chg="mod">
@@ -820,28 +564,6 @@
             <ac:picMk id="3" creationId="{CDC81524-0CF8-8C4C-0B0C-05290FB8EC3F}"/>
           </ac:picMkLst>
         </pc:picChg>
-        <pc:picChg chg="del">
-          <ac:chgData name="Khobo, IL, Dr [ilkhobo@sun.ac.za]" userId="b519a442-dcea-4a28-9c45-7e29f1df5837" providerId="ADAL" clId="{8BC8A5CF-2DB3-45E9-BF57-F2ED810C291E}" dt="2026-09-27T17:47:04.369" v="5357" actId="478"/>
-          <ac:picMkLst>
-            <pc:docMk/>
-            <pc:sldMk cId="1492292624" sldId="606"/>
-            <ac:picMk id="5" creationId="{757D78E4-8067-7DF4-2ECB-283104AD8215}"/>
-          </ac:picMkLst>
-        </pc:picChg>
-      </pc:sldChg>
-      <pc:sldChg chg="addSp delSp modSp del mod modTransition">
-        <pc:chgData name="Khobo, IL, Dr [ilkhobo@sun.ac.za]" userId="b519a442-dcea-4a28-9c45-7e29f1df5837" providerId="ADAL" clId="{8BC8A5CF-2DB3-45E9-BF57-F2ED810C291E}" dt="2026-09-27T14:12:51.665" v="4304" actId="47"/>
-        <pc:sldMkLst>
-          <pc:docMk/>
-          <pc:sldMk cId="3010059276" sldId="606"/>
-        </pc:sldMkLst>
-      </pc:sldChg>
-      <pc:sldChg chg="addSp delSp modSp del mod modTransition">
-        <pc:chgData name="Khobo, IL, Dr [ilkhobo@sun.ac.za]" userId="b519a442-dcea-4a28-9c45-7e29f1df5837" providerId="ADAL" clId="{8BC8A5CF-2DB3-45E9-BF57-F2ED810C291E}" dt="2026-09-27T14:12:51.665" v="4304" actId="47"/>
-        <pc:sldMkLst>
-          <pc:docMk/>
-          <pc:sldMk cId="552240031" sldId="607"/>
-        </pc:sldMkLst>
       </pc:sldChg>
       <pc:sldChg chg="modSp add mod modTransition">
         <pc:chgData name="Khobo, IL, Dr [ilkhobo@sun.ac.za]" userId="b519a442-dcea-4a28-9c45-7e29f1df5837" providerId="ADAL" clId="{8BC8A5CF-2DB3-45E9-BF57-F2ED810C291E}" dt="2026-09-27T19:15:21.744" v="5455"/>
@@ -888,38 +610,6 @@
           <pc:docMk/>
           <pc:sldMk cId="1079290609" sldId="608"/>
         </pc:sldMkLst>
-        <pc:spChg chg="del">
-          <ac:chgData name="Khobo, IL, Dr [ilkhobo@sun.ac.za]" userId="b519a442-dcea-4a28-9c45-7e29f1df5837" providerId="ADAL" clId="{8BC8A5CF-2DB3-45E9-BF57-F2ED810C291E}" dt="2026-09-27T19:15:38.244" v="5459" actId="478"/>
-          <ac:spMkLst>
-            <pc:docMk/>
-            <pc:sldMk cId="1079290609" sldId="608"/>
-            <ac:spMk id="6" creationId="{0AB4BF87-FC44-344F-5CEF-FD6D2E015DA0}"/>
-          </ac:spMkLst>
-        </pc:spChg>
-        <pc:spChg chg="del">
-          <ac:chgData name="Khobo, IL, Dr [ilkhobo@sun.ac.za]" userId="b519a442-dcea-4a28-9c45-7e29f1df5837" providerId="ADAL" clId="{8BC8A5CF-2DB3-45E9-BF57-F2ED810C291E}" dt="2026-09-27T19:15:36.927" v="5458" actId="478"/>
-          <ac:spMkLst>
-            <pc:docMk/>
-            <pc:sldMk cId="1079290609" sldId="608"/>
-            <ac:spMk id="8" creationId="{C1F916AB-9FA5-9103-56D8-45D17CF0E171}"/>
-          </ac:spMkLst>
-        </pc:spChg>
-        <pc:spChg chg="del">
-          <ac:chgData name="Khobo, IL, Dr [ilkhobo@sun.ac.za]" userId="b519a442-dcea-4a28-9c45-7e29f1df5837" providerId="ADAL" clId="{8BC8A5CF-2DB3-45E9-BF57-F2ED810C291E}" dt="2026-09-27T19:15:33.757" v="5457" actId="478"/>
-          <ac:spMkLst>
-            <pc:docMk/>
-            <pc:sldMk cId="1079290609" sldId="608"/>
-            <ac:spMk id="12" creationId="{4C4BAEA0-4256-540A-386E-6305607BF394}"/>
-          </ac:spMkLst>
-        </pc:spChg>
-        <pc:picChg chg="del">
-          <ac:chgData name="Khobo, IL, Dr [ilkhobo@sun.ac.za]" userId="b519a442-dcea-4a28-9c45-7e29f1df5837" providerId="ADAL" clId="{8BC8A5CF-2DB3-45E9-BF57-F2ED810C291E}" dt="2026-09-27T19:15:31.218" v="5456" actId="478"/>
-          <ac:picMkLst>
-            <pc:docMk/>
-            <pc:sldMk cId="1079290609" sldId="608"/>
-            <ac:picMk id="3" creationId="{31982C64-9535-BD98-A703-446AC0B98606}"/>
-          </ac:picMkLst>
-        </pc:picChg>
         <pc:picChg chg="add mod">
           <ac:chgData name="Khobo, IL, Dr [ilkhobo@sun.ac.za]" userId="b519a442-dcea-4a28-9c45-7e29f1df5837" providerId="ADAL" clId="{8BC8A5CF-2DB3-45E9-BF57-F2ED810C291E}" dt="2026-09-27T19:15:42.621" v="5461" actId="1076"/>
           <ac:picMkLst>
@@ -951,28 +641,6 @@
             <ac:graphicFrameMk id="3" creationId="{E39D3499-E8DC-1CC4-5084-340194D4141F}"/>
           </ac:graphicFrameMkLst>
         </pc:graphicFrameChg>
-        <pc:picChg chg="del">
-          <ac:chgData name="Khobo, IL, Dr [ilkhobo@sun.ac.za]" userId="b519a442-dcea-4a28-9c45-7e29f1df5837" providerId="ADAL" clId="{8BC8A5CF-2DB3-45E9-BF57-F2ED810C291E}" dt="2026-09-27T20:28:29.268" v="5463" actId="478"/>
-          <ac:picMkLst>
-            <pc:docMk/>
-            <pc:sldMk cId="182994409" sldId="609"/>
-            <ac:picMk id="4" creationId="{885A7B6D-BEA5-2940-2B7A-0F30DEC003FF}"/>
-          </ac:picMkLst>
-        </pc:picChg>
-      </pc:sldChg>
-      <pc:sldChg chg="delSp modSp add del mod">
-        <pc:chgData name="Khobo, IL, Dr [ilkhobo@sun.ac.za]" userId="b519a442-dcea-4a28-9c45-7e29f1df5837" providerId="ADAL" clId="{8BC8A5CF-2DB3-45E9-BF57-F2ED810C291E}" dt="2026-09-27T14:12:51.665" v="4304" actId="47"/>
-        <pc:sldMkLst>
-          <pc:docMk/>
-          <pc:sldMk cId="3017203269" sldId="609"/>
-        </pc:sldMkLst>
-      </pc:sldChg>
-      <pc:sldChg chg="addSp modSp add del mod modTransition modAnim">
-        <pc:chgData name="Khobo, IL, Dr [ilkhobo@sun.ac.za]" userId="b519a442-dcea-4a28-9c45-7e29f1df5837" providerId="ADAL" clId="{8BC8A5CF-2DB3-45E9-BF57-F2ED810C291E}" dt="2026-09-27T14:12:51.665" v="4304" actId="47"/>
-        <pc:sldMkLst>
-          <pc:docMk/>
-          <pc:sldMk cId="945447278" sldId="610"/>
-        </pc:sldMkLst>
       </pc:sldChg>
       <pc:sldChg chg="addSp delSp modSp new mod">
         <pc:chgData name="Khobo, IL, Dr [ilkhobo@sun.ac.za]" userId="b519a442-dcea-4a28-9c45-7e29f1df5837" providerId="ADAL" clId="{8BC8A5CF-2DB3-45E9-BF57-F2ED810C291E}" dt="2026-09-27T20:33:54.467" v="5523" actId="1076"/>
@@ -980,22 +648,6 @@
           <pc:docMk/>
           <pc:sldMk cId="1015608507" sldId="610"/>
         </pc:sldMkLst>
-        <pc:spChg chg="del">
-          <ac:chgData name="Khobo, IL, Dr [ilkhobo@sun.ac.za]" userId="b519a442-dcea-4a28-9c45-7e29f1df5837" providerId="ADAL" clId="{8BC8A5CF-2DB3-45E9-BF57-F2ED810C291E}" dt="2026-09-27T20:28:35.106" v="5465" actId="478"/>
-          <ac:spMkLst>
-            <pc:docMk/>
-            <pc:sldMk cId="1015608507" sldId="610"/>
-            <ac:spMk id="2" creationId="{DBC17FAF-8F00-7557-7A94-A62C85A1ADBD}"/>
-          </ac:spMkLst>
-        </pc:spChg>
-        <pc:spChg chg="del">
-          <ac:chgData name="Khobo, IL, Dr [ilkhobo@sun.ac.za]" userId="b519a442-dcea-4a28-9c45-7e29f1df5837" providerId="ADAL" clId="{8BC8A5CF-2DB3-45E9-BF57-F2ED810C291E}" dt="2026-09-27T20:28:35.106" v="5465" actId="478"/>
-          <ac:spMkLst>
-            <pc:docMk/>
-            <pc:sldMk cId="1015608507" sldId="610"/>
-            <ac:spMk id="3" creationId="{F2599663-E7C7-8948-13E3-C84747C66F9B}"/>
-          </ac:spMkLst>
-        </pc:spChg>
         <pc:picChg chg="add mod">
           <ac:chgData name="Khobo, IL, Dr [ilkhobo@sun.ac.za]" userId="b519a442-dcea-4a28-9c45-7e29f1df5837" providerId="ADAL" clId="{8BC8A5CF-2DB3-45E9-BF57-F2ED810C291E}" dt="2026-09-27T20:28:58.446" v="5472" actId="1076"/>
           <ac:picMkLst>
@@ -1020,13 +672,6 @@
             <ac:picMk id="9" creationId="{2939E658-D516-DFAD-09DC-ECF5D7D2009A}"/>
           </ac:picMkLst>
         </pc:picChg>
-      </pc:sldChg>
-      <pc:sldChg chg="addSp delSp modSp new del mod modTransition">
-        <pc:chgData name="Khobo, IL, Dr [ilkhobo@sun.ac.za]" userId="b519a442-dcea-4a28-9c45-7e29f1df5837" providerId="ADAL" clId="{8BC8A5CF-2DB3-45E9-BF57-F2ED810C291E}" dt="2026-09-27T14:12:51.665" v="4304" actId="47"/>
-        <pc:sldMkLst>
-          <pc:docMk/>
-          <pc:sldMk cId="2367397481" sldId="611"/>
-        </pc:sldMkLst>
       </pc:sldChg>
       <pc:sldChg chg="addSp modSp add mod modTransition modAnim">
         <pc:chgData name="Khobo, IL, Dr [ilkhobo@sun.ac.za]" userId="b519a442-dcea-4a28-9c45-7e29f1df5837" providerId="ADAL" clId="{8BC8A5CF-2DB3-45E9-BF57-F2ED810C291E}" dt="2026-09-27T20:34:56.297" v="5528"/>
@@ -1059,13 +704,6 @@
           </ac:picMkLst>
         </pc:picChg>
       </pc:sldChg>
-      <pc:sldChg chg="del">
-        <pc:chgData name="Khobo, IL, Dr [ilkhobo@sun.ac.za]" userId="b519a442-dcea-4a28-9c45-7e29f1df5837" providerId="ADAL" clId="{8BC8A5CF-2DB3-45E9-BF57-F2ED810C291E}" dt="2026-09-27T14:12:51.665" v="4304" actId="47"/>
-        <pc:sldMkLst>
-          <pc:docMk/>
-          <pc:sldMk cId="639115839" sldId="612"/>
-        </pc:sldMkLst>
-      </pc:sldChg>
       <pc:sldChg chg="addSp delSp modSp add mod ord">
         <pc:chgData name="Khobo, IL, Dr [ilkhobo@sun.ac.za]" userId="b519a442-dcea-4a28-9c45-7e29f1df5837" providerId="ADAL" clId="{8BC8A5CF-2DB3-45E9-BF57-F2ED810C291E}" dt="2026-09-27T20:36:47.470" v="5538" actId="1076"/>
         <pc:sldMkLst>
@@ -1080,14 +718,6 @@
             <ac:spMk id="36" creationId="{AAF6F38E-6064-8C5D-8E7E-BF175A1451B5}"/>
           </ac:spMkLst>
         </pc:spChg>
-        <pc:graphicFrameChg chg="del">
-          <ac:chgData name="Khobo, IL, Dr [ilkhobo@sun.ac.za]" userId="b519a442-dcea-4a28-9c45-7e29f1df5837" providerId="ADAL" clId="{8BC8A5CF-2DB3-45E9-BF57-F2ED810C291E}" dt="2026-09-27T20:30:49.372" v="5493" actId="478"/>
-          <ac:graphicFrameMkLst>
-            <pc:docMk/>
-            <pc:sldMk cId="1345419713" sldId="612"/>
-            <ac:graphicFrameMk id="3" creationId="{A1B1CB51-44E6-DBD9-BCD0-4C092B20C1EE}"/>
-          </ac:graphicFrameMkLst>
-        </pc:graphicFrameChg>
         <pc:picChg chg="add mod">
           <ac:chgData name="Khobo, IL, Dr [ilkhobo@sun.ac.za]" userId="b519a442-dcea-4a28-9c45-7e29f1df5837" providerId="ADAL" clId="{8BC8A5CF-2DB3-45E9-BF57-F2ED810C291E}" dt="2026-09-27T20:36:47.470" v="5538" actId="1076"/>
           <ac:picMkLst>
@@ -1096,13 +726,6 @@
             <ac:picMk id="4" creationId="{570BF1B5-C518-2562-8D9D-15B12966F85D}"/>
           </ac:picMkLst>
         </pc:picChg>
-      </pc:sldChg>
-      <pc:sldChg chg="del modNotesTx">
-        <pc:chgData name="Khobo, IL, Dr [ilkhobo@sun.ac.za]" userId="b519a442-dcea-4a28-9c45-7e29f1df5837" providerId="ADAL" clId="{8BC8A5CF-2DB3-45E9-BF57-F2ED810C291E}" dt="2026-09-27T14:12:51.665" v="4304" actId="47"/>
-        <pc:sldMkLst>
-          <pc:docMk/>
-          <pc:sldMk cId="1201141998" sldId="613"/>
-        </pc:sldMkLst>
       </pc:sldChg>
       <pc:sldChg chg="addSp delSp modSp add mod">
         <pc:chgData name="Khobo, IL, Dr [ilkhobo@sun.ac.za]" userId="b519a442-dcea-4a28-9c45-7e29f1df5837" providerId="ADAL" clId="{8BC8A5CF-2DB3-45E9-BF57-F2ED810C291E}" dt="2026-09-27T20:41:11.924" v="5551" actId="732"/>
@@ -1118,84 +741,13 @@
             <ac:picMk id="3" creationId="{0FA7B23E-55AC-D2D4-7AAC-533C53A49936}"/>
           </ac:picMkLst>
         </pc:picChg>
-        <pc:picChg chg="del">
-          <ac:chgData name="Khobo, IL, Dr [ilkhobo@sun.ac.za]" userId="b519a442-dcea-4a28-9c45-7e29f1df5837" providerId="ADAL" clId="{8BC8A5CF-2DB3-45E9-BF57-F2ED810C291E}" dt="2026-09-27T20:39:27.673" v="5540" actId="478"/>
-          <ac:picMkLst>
-            <pc:docMk/>
-            <pc:sldMk cId="3743100929" sldId="613"/>
-            <ac:picMk id="4" creationId="{7F9D3F51-A42F-1D3E-1453-E1481E42D527}"/>
-          </ac:picMkLst>
-        </pc:picChg>
-      </pc:sldChg>
-      <pc:sldChg chg="del modNotesTx">
-        <pc:chgData name="Khobo, IL, Dr [ilkhobo@sun.ac.za]" userId="b519a442-dcea-4a28-9c45-7e29f1df5837" providerId="ADAL" clId="{8BC8A5CF-2DB3-45E9-BF57-F2ED810C291E}" dt="2026-09-27T14:12:51.665" v="4304" actId="47"/>
-        <pc:sldMkLst>
-          <pc:docMk/>
-          <pc:sldMk cId="3114857847" sldId="614"/>
-        </pc:sldMkLst>
-      </pc:sldChg>
-      <pc:sldChg chg="del">
-        <pc:chgData name="Khobo, IL, Dr [ilkhobo@sun.ac.za]" userId="b519a442-dcea-4a28-9c45-7e29f1df5837" providerId="ADAL" clId="{8BC8A5CF-2DB3-45E9-BF57-F2ED810C291E}" dt="2026-09-27T14:12:51.665" v="4304" actId="47"/>
-        <pc:sldMkLst>
-          <pc:docMk/>
-          <pc:sldMk cId="1978251514" sldId="616"/>
-        </pc:sldMkLst>
-      </pc:sldChg>
-      <pc:sldChg chg="del">
-        <pc:chgData name="Khobo, IL, Dr [ilkhobo@sun.ac.za]" userId="b519a442-dcea-4a28-9c45-7e29f1df5837" providerId="ADAL" clId="{8BC8A5CF-2DB3-45E9-BF57-F2ED810C291E}" dt="2026-09-27T14:12:51.665" v="4304" actId="47"/>
-        <pc:sldMkLst>
-          <pc:docMk/>
-          <pc:sldMk cId="527048431" sldId="619"/>
-        </pc:sldMkLst>
-      </pc:sldChg>
-      <pc:sldChg chg="addSp delSp modSp del mod">
-        <pc:chgData name="Khobo, IL, Dr [ilkhobo@sun.ac.za]" userId="b519a442-dcea-4a28-9c45-7e29f1df5837" providerId="ADAL" clId="{8BC8A5CF-2DB3-45E9-BF57-F2ED810C291E}" dt="2026-09-27T14:12:51.665" v="4304" actId="47"/>
-        <pc:sldMkLst>
-          <pc:docMk/>
-          <pc:sldMk cId="1080558192" sldId="620"/>
-        </pc:sldMkLst>
-      </pc:sldChg>
-      <pc:sldChg chg="addSp delSp modSp add del mod">
-        <pc:chgData name="Khobo, IL, Dr [ilkhobo@sun.ac.za]" userId="b519a442-dcea-4a28-9c45-7e29f1df5837" providerId="ADAL" clId="{8BC8A5CF-2DB3-45E9-BF57-F2ED810C291E}" dt="2026-09-27T14:12:51.665" v="4304" actId="47"/>
-        <pc:sldMkLst>
-          <pc:docMk/>
-          <pc:sldMk cId="1018022777" sldId="621"/>
-        </pc:sldMkLst>
-      </pc:sldChg>
-      <pc:sldChg chg="addSp delSp modSp add del mod">
-        <pc:chgData name="Khobo, IL, Dr [ilkhobo@sun.ac.za]" userId="b519a442-dcea-4a28-9c45-7e29f1df5837" providerId="ADAL" clId="{8BC8A5CF-2DB3-45E9-BF57-F2ED810C291E}" dt="2026-09-27T14:12:51.665" v="4304" actId="47"/>
-        <pc:sldMkLst>
-          <pc:docMk/>
-          <pc:sldMk cId="1497589234" sldId="622"/>
-        </pc:sldMkLst>
-      </pc:sldChg>
-      <pc:sldChg chg="addSp delSp modSp add del mod">
-        <pc:chgData name="Khobo, IL, Dr [ilkhobo@sun.ac.za]" userId="b519a442-dcea-4a28-9c45-7e29f1df5837" providerId="ADAL" clId="{8BC8A5CF-2DB3-45E9-BF57-F2ED810C291E}" dt="2026-09-27T14:12:51.665" v="4304" actId="47"/>
-        <pc:sldMkLst>
-          <pc:docMk/>
-          <pc:sldMk cId="1675154120" sldId="623"/>
-        </pc:sldMkLst>
-      </pc:sldChg>
-      <pc:sldChg chg="del">
-        <pc:chgData name="Khobo, IL, Dr [ilkhobo@sun.ac.za]" userId="b519a442-dcea-4a28-9c45-7e29f1df5837" providerId="ADAL" clId="{8BC8A5CF-2DB3-45E9-BF57-F2ED810C291E}" dt="2026-09-27T14:12:51.665" v="4304" actId="47"/>
-        <pc:sldMkLst>
-          <pc:docMk/>
-          <pc:sldMk cId="376086277" sldId="624"/>
-        </pc:sldMkLst>
-      </pc:sldChg>
-      <pc:sldChg chg="del">
-        <pc:chgData name="Khobo, IL, Dr [ilkhobo@sun.ac.za]" userId="b519a442-dcea-4a28-9c45-7e29f1df5837" providerId="ADAL" clId="{8BC8A5CF-2DB3-45E9-BF57-F2ED810C291E}" dt="2026-09-27T14:12:51.665" v="4304" actId="47"/>
-        <pc:sldMkLst>
-          <pc:docMk/>
-          <pc:sldMk cId="997195380" sldId="625"/>
-        </pc:sldMkLst>
       </pc:sldChg>
     </pc:docChg>
   </pc:docChgLst>
   <pc:docChgLst>
     <pc:chgData name="Khobo, IL, Dr [ilkhobo@sun.ac.za]" userId="b519a442-dcea-4a28-9c45-7e29f1df5837" providerId="ADAL" clId="{D25D1C45-A404-4E0F-8657-49BD4E4887CA}"/>
     <pc:docChg chg="undo redo custSel addSld delSld modSld">
-      <pc:chgData name="Khobo, IL, Dr [ilkhobo@sun.ac.za]" userId="b519a442-dcea-4a28-9c45-7e29f1df5837" providerId="ADAL" clId="{D25D1C45-A404-4E0F-8657-49BD4E4887CA}" dt="2026-09-28T05:59:46.819" v="2977" actId="20577"/>
+      <pc:chgData name="Khobo, IL, Dr [ilkhobo@sun.ac.za]" userId="b519a442-dcea-4a28-9c45-7e29f1df5837" providerId="ADAL" clId="{D25D1C45-A404-4E0F-8657-49BD4E4887CA}" dt="2026-09-29T12:21:56.408" v="2992" actId="20577"/>
       <pc:docMkLst>
         <pc:docMk/>
       </pc:docMkLst>
@@ -1219,6 +771,36 @@
             <pc:docMk/>
             <pc:sldMk cId="2601401026" sldId="597"/>
             <ac:spMk id="34" creationId="{593DD671-6E7B-06CE-9A2D-78AB0133EE61}"/>
+          </ac:spMkLst>
+        </pc:spChg>
+      </pc:sldChg>
+      <pc:sldChg chg="modSp mod">
+        <pc:chgData name="Khobo, IL, Dr [ilkhobo@sun.ac.za]" userId="b519a442-dcea-4a28-9c45-7e29f1df5837" providerId="ADAL" clId="{D25D1C45-A404-4E0F-8657-49BD4E4887CA}" dt="2026-09-29T12:21:56.408" v="2992" actId="20577"/>
+        <pc:sldMkLst>
+          <pc:docMk/>
+          <pc:sldMk cId="3208347062" sldId="598"/>
+        </pc:sldMkLst>
+        <pc:spChg chg="mod">
+          <ac:chgData name="Khobo, IL, Dr [ilkhobo@sun.ac.za]" userId="b519a442-dcea-4a28-9c45-7e29f1df5837" providerId="ADAL" clId="{D25D1C45-A404-4E0F-8657-49BD4E4887CA}" dt="2026-09-29T12:21:56.408" v="2992" actId="20577"/>
+          <ac:spMkLst>
+            <pc:docMk/>
+            <pc:sldMk cId="3208347062" sldId="598"/>
+            <ac:spMk id="8" creationId="{DF20D7B5-BB01-AF72-9F07-1C404D1ADB9C}"/>
+          </ac:spMkLst>
+        </pc:spChg>
+      </pc:sldChg>
+      <pc:sldChg chg="modSp mod">
+        <pc:chgData name="Khobo, IL, Dr [ilkhobo@sun.ac.za]" userId="b519a442-dcea-4a28-9c45-7e29f1df5837" providerId="ADAL" clId="{D25D1C45-A404-4E0F-8657-49BD4E4887CA}" dt="2026-09-29T07:48:14.167" v="2983" actId="20577"/>
+        <pc:sldMkLst>
+          <pc:docMk/>
+          <pc:sldMk cId="4217422227" sldId="599"/>
+        </pc:sldMkLst>
+        <pc:spChg chg="mod">
+          <ac:chgData name="Khobo, IL, Dr [ilkhobo@sun.ac.za]" userId="b519a442-dcea-4a28-9c45-7e29f1df5837" providerId="ADAL" clId="{D25D1C45-A404-4E0F-8657-49BD4E4887CA}" dt="2026-09-29T07:48:14.167" v="2983" actId="20577"/>
+          <ac:spMkLst>
+            <pc:docMk/>
+            <pc:sldMk cId="4217422227" sldId="599"/>
+            <ac:spMk id="4" creationId="{33E6D6FA-237D-82AA-AEAC-C8CD78996706}"/>
           </ac:spMkLst>
         </pc:spChg>
       </pc:sldChg>
@@ -1309,7 +891,7 @@
           <a:p>
             <a:fld id="{77A4F8E5-B141-4125-AE90-AB7E5CBBF318}" type="datetimeFigureOut">
               <a:rPr lang="en-ZA" smtClean="0"/>
-              <a:t>2026/09/28</a:t>
+              <a:t>2026/09/29</a:t>
             </a:fld>
             <a:endParaRPr lang="en-ZA"/>
           </a:p>
@@ -4357,7 +3939,7 @@
           <a:p>
             <a:fld id="{B97883AC-2ECA-4D97-B466-56E37F2202F1}" type="datetimeFigureOut">
               <a:rPr lang="en-ZA" smtClean="0"/>
-              <a:t>2026/09/28</a:t>
+              <a:t>2026/09/29</a:t>
             </a:fld>
             <a:endParaRPr lang="en-ZA"/>
           </a:p>
@@ -4557,7 +4139,7 @@
           <a:p>
             <a:fld id="{B97883AC-2ECA-4D97-B466-56E37F2202F1}" type="datetimeFigureOut">
               <a:rPr lang="en-ZA" smtClean="0"/>
-              <a:t>2026/09/28</a:t>
+              <a:t>2026/09/29</a:t>
             </a:fld>
             <a:endParaRPr lang="en-ZA"/>
           </a:p>
@@ -4767,7 +4349,7 @@
           <a:p>
             <a:fld id="{B97883AC-2ECA-4D97-B466-56E37F2202F1}" type="datetimeFigureOut">
               <a:rPr lang="en-ZA" smtClean="0"/>
-              <a:t>2026/09/28</a:t>
+              <a:t>2026/09/29</a:t>
             </a:fld>
             <a:endParaRPr lang="en-ZA"/>
           </a:p>
@@ -4967,7 +4549,7 @@
           <a:p>
             <a:fld id="{B97883AC-2ECA-4D97-B466-56E37F2202F1}" type="datetimeFigureOut">
               <a:rPr lang="en-ZA" smtClean="0"/>
-              <a:t>2026/09/28</a:t>
+              <a:t>2026/09/29</a:t>
             </a:fld>
             <a:endParaRPr lang="en-ZA"/>
           </a:p>
@@ -5243,7 +4825,7 @@
           <a:p>
             <a:fld id="{B97883AC-2ECA-4D97-B466-56E37F2202F1}" type="datetimeFigureOut">
               <a:rPr lang="en-ZA" smtClean="0"/>
-              <a:t>2026/09/28</a:t>
+              <a:t>2026/09/29</a:t>
             </a:fld>
             <a:endParaRPr lang="en-ZA"/>
           </a:p>
@@ -5511,7 +5093,7 @@
           <a:p>
             <a:fld id="{B97883AC-2ECA-4D97-B466-56E37F2202F1}" type="datetimeFigureOut">
               <a:rPr lang="en-ZA" smtClean="0"/>
-              <a:t>2026/09/28</a:t>
+              <a:t>2026/09/29</a:t>
             </a:fld>
             <a:endParaRPr lang="en-ZA"/>
           </a:p>
@@ -5926,7 +5508,7 @@
           <a:p>
             <a:fld id="{B97883AC-2ECA-4D97-B466-56E37F2202F1}" type="datetimeFigureOut">
               <a:rPr lang="en-ZA" smtClean="0"/>
-              <a:t>2026/09/28</a:t>
+              <a:t>2026/09/29</a:t>
             </a:fld>
             <a:endParaRPr lang="en-ZA"/>
           </a:p>
@@ -6068,7 +5650,7 @@
           <a:p>
             <a:fld id="{B97883AC-2ECA-4D97-B466-56E37F2202F1}" type="datetimeFigureOut">
               <a:rPr lang="en-ZA" smtClean="0"/>
-              <a:t>2026/09/28</a:t>
+              <a:t>2026/09/29</a:t>
             </a:fld>
             <a:endParaRPr lang="en-ZA"/>
           </a:p>
@@ -6181,7 +5763,7 @@
           <a:p>
             <a:fld id="{B97883AC-2ECA-4D97-B466-56E37F2202F1}" type="datetimeFigureOut">
               <a:rPr lang="en-ZA" smtClean="0"/>
-              <a:t>2026/09/28</a:t>
+              <a:t>2026/09/29</a:t>
             </a:fld>
             <a:endParaRPr lang="en-ZA"/>
           </a:p>
@@ -6494,7 +6076,7 @@
           <a:p>
             <a:fld id="{B97883AC-2ECA-4D97-B466-56E37F2202F1}" type="datetimeFigureOut">
               <a:rPr lang="en-ZA" smtClean="0"/>
-              <a:t>2026/09/28</a:t>
+              <a:t>2026/09/29</a:t>
             </a:fld>
             <a:endParaRPr lang="en-ZA"/>
           </a:p>
@@ -6783,7 +6365,7 @@
           <a:p>
             <a:fld id="{B97883AC-2ECA-4D97-B466-56E37F2202F1}" type="datetimeFigureOut">
               <a:rPr lang="en-ZA" smtClean="0"/>
-              <a:t>2026/09/28</a:t>
+              <a:t>2026/09/29</a:t>
             </a:fld>
             <a:endParaRPr lang="en-ZA"/>
           </a:p>
@@ -7026,7 +6608,7 @@
           <a:p>
             <a:fld id="{B97883AC-2ECA-4D97-B466-56E37F2202F1}" type="datetimeFigureOut">
               <a:rPr lang="en-ZA" smtClean="0"/>
-              <a:t>2026/09/28</a:t>
+              <a:t>2026/09/29</a:t>
             </a:fld>
             <a:endParaRPr lang="en-ZA"/>
           </a:p>
@@ -9852,13 +9434,13 @@
   <p:clrMapOvr>
     <a:masterClrMapping/>
   </p:clrMapOvr>
-  <mc:AlternateContent xmlns:mc="http://schemas.openxmlformats.org/markup-compatibility/2006">
-    <mc:Choice xmlns:p159="http://schemas.microsoft.com/office/powerpoint/2015/09/main" Requires="p159">
+  <mc:AlternateContent xmlns:mc="http://schemas.openxmlformats.org/markup-compatibility/2006" xmlns:p159="http://schemas.microsoft.com/office/powerpoint/2015/09/main">
+    <mc:Choice Requires="p159">
       <p:transition xmlns:p14="http://schemas.microsoft.com/office/powerpoint/2010/main" spd="slow" p14:dur="2000">
         <p159:morph option="byObject"/>
       </p:transition>
     </mc:Choice>
-    <mc:Fallback>
+    <mc:Fallback xmlns="">
       <p:transition spd="slow">
         <p:fade/>
       </p:transition>
@@ -10775,8 +10357,8 @@
           </p:txBody>
         </p:sp>
       </p:grpSp>
-      <mc:AlternateContent xmlns:mc="http://schemas.openxmlformats.org/markup-compatibility/2006">
-        <mc:Choice xmlns:pslz="http://schemas.microsoft.com/office/powerpoint/2016/slidezoom" Requires="pslz">
+      <mc:AlternateContent xmlns:mc="http://schemas.openxmlformats.org/markup-compatibility/2006" xmlns:pslz="http://schemas.microsoft.com/office/powerpoint/2016/slidezoom">
+        <mc:Choice Requires="pslz">
           <p:graphicFrame>
             <p:nvGraphicFramePr>
               <p:cNvPr id="3" name="Slide Zoom 2">
@@ -10828,7 +10410,7 @@
             </a:graphic>
           </p:graphicFrame>
         </mc:Choice>
-        <mc:Fallback>
+        <mc:Fallback xmlns="">
           <p:pic>
             <p:nvPicPr>
               <p:cNvPr id="3" name="Slide Zoom 2">
@@ -10845,7 +10427,7 @@
               <p:nvPr/>
             </p:nvPicPr>
             <p:blipFill>
-              <a:blip r:embed="rId4"/>
+              <a:blip r:embed="rId6"/>
               <a:stretch>
                 <a:fillRect/>
               </a:stretch>
@@ -11121,13 +10703,13 @@
   <p:clrMapOvr>
     <a:masterClrMapping/>
   </p:clrMapOvr>
-  <mc:AlternateContent xmlns:mc="http://schemas.openxmlformats.org/markup-compatibility/2006">
-    <mc:Choice xmlns:p159="http://schemas.microsoft.com/office/powerpoint/2015/09/main" Requires="p159">
+  <mc:AlternateContent xmlns:mc="http://schemas.openxmlformats.org/markup-compatibility/2006" xmlns:p159="http://schemas.microsoft.com/office/powerpoint/2015/09/main">
+    <mc:Choice Requires="p159">
       <p:transition xmlns:p14="http://schemas.microsoft.com/office/powerpoint/2010/main" spd="slow" p14:dur="2000">
         <p159:morph option="byObject"/>
       </p:transition>
     </mc:Choice>
-    <mc:Fallback>
+    <mc:Fallback xmlns="">
       <p:transition spd="slow">
         <p:fade/>
       </p:transition>
@@ -12671,10 +12253,10 @@
           <a:p>
             <a:pPr algn="ctr"/>
             <a:r>
-              <a:rPr lang="en-ZA">
+              <a:rPr lang="en-ZA" dirty="0">
                 <a:latin typeface="LM Roman 12" panose="00000500000000000000" pitchFamily="50" charset="0"/>
               </a:rPr>
-              <a:t>Primitive</a:t>
+              <a:t>Built-in/Primitive</a:t>
             </a:r>
           </a:p>
         </p:txBody>
@@ -15265,7 +14847,7 @@
           <a:p>
             <a:pPr algn="ctr"/>
             <a:r>
-              <a:rPr lang="en-ZA" sz="4400" b="1">
+              <a:rPr lang="en-ZA" sz="4400" b="1" dirty="0">
                 <a:solidFill>
                   <a:srgbClr val="00B0F0"/>
                 </a:solidFill>
@@ -15274,7 +14856,7 @@
               <a:t>struct</a:t>
             </a:r>
             <a:r>
-              <a:rPr lang="en-ZA" sz="4400" b="1">
+              <a:rPr lang="en-ZA" sz="4400" b="1" dirty="0">
                 <a:solidFill>
                   <a:srgbClr val="FF0000"/>
                 </a:solidFill>
@@ -15283,7 +14865,7 @@
               <a:t> </a:t>
             </a:r>
             <a:r>
-              <a:rPr lang="en-ZA" sz="4400" b="1" err="1">
+              <a:rPr lang="en-ZA" sz="4400" b="1" dirty="0" err="1">
                 <a:solidFill>
                   <a:srgbClr val="FF0000"/>
                 </a:solidFill>
@@ -15292,13 +14874,13 @@
               <a:t>structName</a:t>
             </a:r>
             <a:r>
-              <a:rPr lang="en-ZA" sz="4400">
+              <a:rPr lang="en-ZA" sz="4400" dirty="0">
                 <a:latin typeface="LM Roman 12" panose="00000500000000000000" pitchFamily="50" charset="0"/>
               </a:rPr>
               <a:t> </a:t>
             </a:r>
             <a:r>
-              <a:rPr lang="en-ZA" sz="4400" b="1">
+              <a:rPr lang="en-ZA" sz="4400" b="1" dirty="0">
                 <a:solidFill>
                   <a:schemeClr val="tx1"/>
                 </a:solidFill>
@@ -15310,7 +14892,7 @@
           <a:p>
             <a:pPr algn="ctr"/>
             <a:r>
-              <a:rPr lang="en-ZA" sz="4400" b="1">
+              <a:rPr lang="en-ZA" sz="4400" b="1" dirty="0">
                 <a:solidFill>
                   <a:srgbClr val="00B0F0"/>
                 </a:solidFill>
@@ -15319,19 +14901,19 @@
               <a:t>								member1</a:t>
             </a:r>
             <a:r>
-              <a:rPr lang="en-ZA" sz="4400" b="1">
+              <a:rPr lang="en-ZA" sz="4400" b="1" dirty="0">
                 <a:solidFill>
                   <a:schemeClr val="tx1"/>
                 </a:solidFill>
                 <a:latin typeface="LM Roman 12" panose="00000500000000000000" pitchFamily="50" charset="0"/>
               </a:rPr>
-              <a:t> , </a:t>
+              <a:t> ; </a:t>
             </a:r>
           </a:p>
           <a:p>
             <a:pPr algn="ctr"/>
             <a:r>
-              <a:rPr lang="en-ZA" sz="4400" b="1">
+              <a:rPr lang="en-ZA" sz="4400" b="1" dirty="0">
                 <a:solidFill>
                   <a:srgbClr val="00B0F0"/>
                 </a:solidFill>
@@ -15340,19 +14922,19 @@
               <a:t>								member2</a:t>
             </a:r>
             <a:r>
-              <a:rPr lang="en-ZA" sz="4400" b="1">
+              <a:rPr lang="en-ZA" sz="4400" b="1" dirty="0">
                 <a:solidFill>
                   <a:schemeClr val="tx1"/>
                 </a:solidFill>
                 <a:latin typeface="LM Roman 12" panose="00000500000000000000" pitchFamily="50" charset="0"/>
               </a:rPr>
-              <a:t> , </a:t>
+              <a:t> ; </a:t>
             </a:r>
           </a:p>
           <a:p>
             <a:pPr algn="ctr"/>
             <a:r>
-              <a:rPr lang="en-ZA" sz="4400" b="1">
+              <a:rPr lang="en-ZA" sz="4400" b="1" dirty="0">
                 <a:solidFill>
                   <a:srgbClr val="00B0F0"/>
                 </a:solidFill>
@@ -15361,19 +14943,19 @@
               <a:t>								member3</a:t>
             </a:r>
             <a:r>
-              <a:rPr lang="en-ZA" sz="4400" b="1">
+              <a:rPr lang="en-ZA" sz="4400" b="1" dirty="0">
                 <a:solidFill>
                   <a:schemeClr val="tx1"/>
                 </a:solidFill>
                 <a:latin typeface="LM Roman 12" panose="00000500000000000000" pitchFamily="50" charset="0"/>
               </a:rPr>
-              <a:t>, </a:t>
+              <a:t>; </a:t>
             </a:r>
           </a:p>
           <a:p>
             <a:pPr algn="ctr"/>
             <a:r>
-              <a:rPr lang="en-ZA" sz="4400" b="1">
+              <a:rPr lang="en-ZA" sz="4400" b="1" dirty="0">
                 <a:solidFill>
                   <a:schemeClr val="tx1"/>
                 </a:solidFill>
@@ -18033,13 +17615,13 @@
   <p:clrMapOvr>
     <a:masterClrMapping/>
   </p:clrMapOvr>
-  <mc:AlternateContent xmlns:mc="http://schemas.openxmlformats.org/markup-compatibility/2006">
-    <mc:Choice xmlns:p159="http://schemas.microsoft.com/office/powerpoint/2015/09/main" Requires="p159">
+  <mc:AlternateContent xmlns:mc="http://schemas.openxmlformats.org/markup-compatibility/2006" xmlns:p159="http://schemas.microsoft.com/office/powerpoint/2015/09/main">
+    <mc:Choice Requires="p159">
       <p:transition xmlns:p14="http://schemas.microsoft.com/office/powerpoint/2010/main" spd="slow" p14:dur="2000">
         <p159:morph option="byObject"/>
       </p:transition>
     </mc:Choice>
-    <mc:Fallback>
+    <mc:Fallback xmlns="">
       <p:transition spd="slow">
         <p:fade/>
       </p:transition>
@@ -18736,13 +18318,13 @@
   <p:clrMapOvr>
     <a:masterClrMapping/>
   </p:clrMapOvr>
-  <mc:AlternateContent xmlns:mc="http://schemas.openxmlformats.org/markup-compatibility/2006">
-    <mc:Choice xmlns:p159="http://schemas.microsoft.com/office/powerpoint/2015/09/main" Requires="p159">
+  <mc:AlternateContent xmlns:mc="http://schemas.openxmlformats.org/markup-compatibility/2006" xmlns:p159="http://schemas.microsoft.com/office/powerpoint/2015/09/main">
+    <mc:Choice Requires="p159">
       <p:transition xmlns:p14="http://schemas.microsoft.com/office/powerpoint/2010/main" spd="slow" p14:dur="2000">
         <p159:morph option="byObject"/>
       </p:transition>
     </mc:Choice>
-    <mc:Fallback>
+    <mc:Fallback xmlns="">
       <p:transition spd="slow">
         <p:fade/>
       </p:transition>
@@ -19445,13 +19027,13 @@
   <p:clrMapOvr>
     <a:masterClrMapping/>
   </p:clrMapOvr>
-  <mc:AlternateContent xmlns:mc="http://schemas.openxmlformats.org/markup-compatibility/2006">
-    <mc:Choice xmlns:p159="http://schemas.microsoft.com/office/powerpoint/2015/09/main" Requires="p159">
+  <mc:AlternateContent xmlns:mc="http://schemas.openxmlformats.org/markup-compatibility/2006" xmlns:p159="http://schemas.microsoft.com/office/powerpoint/2015/09/main">
+    <mc:Choice Requires="p159">
       <p:transition xmlns:p14="http://schemas.microsoft.com/office/powerpoint/2010/main" spd="slow" p14:dur="2000">
         <p159:morph option="byObject"/>
       </p:transition>
     </mc:Choice>
-    <mc:Fallback>
+    <mc:Fallback xmlns="">
       <p:transition spd="slow">
         <p:fade/>
       </p:transition>
